--- a/docs/specs/微积分学伴_项目介绍.pptx
+++ b/docs/specs/微积分学伴_项目介绍.pptx
@@ -12447,182 +12447,6 @@
       </p:sp>
       <p:sp>
         <p:nvSpPr>
-          <p:cNvPr id="182" name="Rounded Rectangle 38"/>
-          <p:cNvSpPr/>
-          <p:nvPr/>
-        </p:nvSpPr>
-        <p:spPr>
-          <a:xfrm>
-            <a:off x="8667750" y="3943350"/>
-            <a:ext cx="2914650" cy="2343150"/>
-          </a:xfrm>
-          <a:prstGeom prst="roundRect">
-            <a:avLst>
-              <a:gd name="adj" fmla="val 4878"/>
-            </a:avLst>
-          </a:prstGeom>
-          <a:solidFill>
-            <a:srgbClr val="FFFFFF"/>
-          </a:solidFill>
-          <a:ln w="19050">
-            <a:solidFill>
-              <a:srgbClr val="854F0B"/>
-            </a:solidFill>
-          </a:ln>
-          <a:effectLst/>
-        </p:spPr>
-        <p:txBody>
-          <a:bodyPr rtlCol="0" anchor="ctr"/>
-          <a:lstStyle/>
-          <a:p>
-            <a:pPr algn="ctr"/>
-            <a:endParaRPr/>
-          </a:p>
-        </p:txBody>
-      </p:sp>
-      <p:sp>
-        <p:nvSpPr>
-          <p:cNvPr id="183" name="TextBox 39"/>
-          <p:cNvSpPr txBox="1"/>
-          <p:nvPr/>
-        </p:nvSpPr>
-        <p:spPr>
-          <a:xfrm>
-            <a:off x="8877300" y="4114800"/>
-            <a:ext cx="2495550" cy="228600"/>
-          </a:xfrm>
-          <a:prstGeom prst="rect">
-            <a:avLst/>
-          </a:prstGeom>
-          <a:noFill/>
-        </p:spPr>
-        <p:txBody>
-          <a:bodyPr wrap="square" lIns="0" tIns="0" rIns="0" bIns="0" anchor="t">
-            <a:noAutofit/>
-          </a:bodyPr>
-          <a:lstStyle/>
-          <a:p>
-            <a:pPr algn="l">
-              <a:lnSpc>
-                <a:spcPct val="108300"/>
-              </a:lnSpc>
-            </a:pPr>
-            <a:r>
-              <a:rPr lang="zh-CN" sz="1125" b="1">
-                <a:solidFill>
-                  <a:srgbClr val="854F0B"/>
-                </a:solidFill>
-                <a:latin typeface="Microsoft YaHei"/>
-                <a:ea typeface="Microsoft YaHei"/>
-                <a:cs typeface="Microsoft YaHei"/>
-              </a:rPr>
-              <a:t>演示前必须做的事</a:t>
-            </a:r>
-            <a:r>
-              <a:rPr lang="zh-CN" sz="1125" b="1">
-                <a:solidFill>
-                  <a:srgbClr val="854F0B"/>
-                </a:solidFill>
-                <a:latin typeface="Microsoft YaHei"/>
-                <a:ea typeface="Microsoft YaHei"/>
-                <a:cs typeface="Microsoft YaHei"/>
-              </a:rPr>
-              <a:t>-</a:t>
-            </a:r>
-            <a:endParaRPr lang="zh-CN" sz="1125" b="1">
-              <a:solidFill>
-                <a:srgbClr val="854F0B"/>
-              </a:solidFill>
-              <a:latin typeface="Microsoft YaHei"/>
-              <a:ea typeface="Microsoft YaHei"/>
-              <a:cs typeface="Microsoft YaHei"/>
-            </a:endParaRPr>
-          </a:p>
-        </p:txBody>
-      </p:sp>
-      <p:sp>
-        <p:nvSpPr>
-          <p:cNvPr id="184" name="TextBox 40"/>
-          <p:cNvSpPr txBox="1"/>
-          <p:nvPr/>
-        </p:nvSpPr>
-        <p:spPr>
-          <a:xfrm>
-            <a:off x="8877300" y="4400550"/>
-            <a:ext cx="2495550" cy="1752600"/>
-          </a:xfrm>
-          <a:prstGeom prst="rect">
-            <a:avLst/>
-          </a:prstGeom>
-          <a:noFill/>
-        </p:spPr>
-        <p:txBody>
-          <a:bodyPr wrap="square" lIns="0" tIns="0" rIns="0" bIns="0" anchor="t">
-            <a:noAutofit/>
-          </a:bodyPr>
-          <a:lstStyle/>
-          <a:p>
-            <a:pPr algn="l">
-              <a:lnSpc>
-                <a:spcPct val="141700"/>
-              </a:lnSpc>
-            </a:pPr>
-            <a:r>
-              <a:rPr lang="zh-CN" sz="1200" b="0">
-                <a:solidFill>
-                  <a:srgbClr val="6B6B66"/>
-                </a:solidFill>
-                <a:latin typeface="Microsoft YaHei"/>
-                <a:ea typeface="Microsoft YaHei"/>
-                <a:cs typeface="Microsoft YaHei"/>
-              </a:rPr>
-              <a:t>① ✅ 话筒输入已在演示机实测（能顺利转出文字）</a:t>
-            </a:r>
-            <a:endParaRPr/>
-          </a:p>
-          <a:p>
-            <a:pPr algn="l">
-              <a:lnSpc>
-                <a:spcPct val="141700"/>
-              </a:lnSpc>
-            </a:pPr>
-            <a:r>
-              <a:rPr lang="zh-CN" sz="1200" b="0">
-                <a:solidFill>
-                  <a:srgbClr val="6B6B66"/>
-                </a:solidFill>
-                <a:latin typeface="Microsoft YaHei"/>
-                <a:ea typeface="Microsoft YaHei"/>
-                <a:cs typeface="Microsoft YaHei"/>
-              </a:rPr>
-              <a:t>② ✅ 线上链接已在真实浏览器实测（是打开页面）</a:t>
-            </a:r>
-            <a:endParaRPr/>
-          </a:p>
-          <a:p>
-            <a:pPr algn="l">
-              <a:lnSpc>
-                <a:spcPct val="141700"/>
-              </a:lnSpc>
-            </a:pPr>
-            <a:r>
-              <a:rPr lang="zh-CN" sz="1200" b="0">
-                <a:solidFill>
-                  <a:srgbClr val="6B6B66"/>
-                </a:solidFill>
-                <a:latin typeface="Microsoft YaHei"/>
-                <a:ea typeface="Microsoft YaHei"/>
-                <a:cs typeface="Microsoft YaHei"/>
-              </a:rPr>
-              <a:t>③ 演示前先打开一次做预热（冷启动首访需等约 30 秒，属正常）</a:t>
-            </a:r>
-            <a:endParaRPr/>
-          </a:p>
-        </p:txBody>
-      </p:sp>
-      <p:sp>
-        <p:nvSpPr>
           <p:cNvPr id="185" name="Rectangle 41"/>
           <p:cNvSpPr/>
           <p:nvPr/>
@@ -13253,6 +13077,69 @@
           </a:p>
         </p:txBody>
       </p:sp>
+      <p:sp>
+        <p:nvSpPr>
+          <p:cNvPr id="201" name="TextBox Team"/>
+          <p:cNvSpPr txBox="1"/>
+          <p:nvPr/>
+        </p:nvSpPr>
+        <p:spPr>
+          <a:xfrm>
+            <a:off x="2286000" y="5334000"/>
+            <a:ext cx="7620000" cy="914400"/>
+          </a:xfrm>
+          <a:prstGeom prst="rect">
+            <a:avLst/>
+          </a:prstGeom>
+          <a:noFill/>
+        </p:spPr>
+        <p:txBody>
+          <a:bodyPr wrap="square" rtlCol="0" anchor="ctr"/>
+          <a:lstStyle/>
+          <a:p>
+            <a:pPr algn="ctr"/>
+            <a:r>
+              <a:rPr sz="1050" b="0">
+                <a:solidFill>
+                  <a:srgbClr val="CFE2DD"/>
+                </a:solidFill>
+                <a:latin typeface="Microsoft YaHei"/>
+                <a:ea typeface="Microsoft YaHei"/>
+                <a:cs typeface="Microsoft YaHei"/>
+              </a:rPr>
+              <a:t>团队 · 东马星辰 ｜ 三个不同学科，分工明确</a:t>
+            </a:r>
+          </a:p>
+          <a:p>
+            <a:pPr algn="ctr"/>
+            <a:r>
+              <a:rPr sz="1050" b="0">
+                <a:solidFill>
+                  <a:srgbClr val="CFE2DD"/>
+                </a:solidFill>
+                <a:latin typeface="Microsoft YaHei"/>
+                <a:ea typeface="Microsoft YaHei"/>
+                <a:cs typeface="Microsoft YaHei"/>
+              </a:rPr>
+              <a:t>王东麒（材料科学与工程）· 苏振轩（电气工程及其自动化）· 黄浩（计算机科学与技术）</a:t>
+            </a:r>
+          </a:p>
+          <a:p>
+            <a:pPr algn="ctr"/>
+            <a:r>
+              <a:rPr sz="1050" b="0">
+                <a:solidFill>
+                  <a:srgbClr val="CFE2DD"/>
+                </a:solidFill>
+                <a:latin typeface="Microsoft YaHei"/>
+                <a:ea typeface="Microsoft YaHei"/>
+                <a:cs typeface="Microsoft YaHei"/>
+              </a:rPr>
+              <a:t>分工：学习工作台 ／ 教学智能 ／ 服务、集成与部署</a:t>
+            </a:r>
+          </a:p>
+        </p:txBody>
+      </p:sp>
     </p:spTree>
   </p:cSld>
   <p:clrMapOvr>
@@ -26666,7 +26553,7 @@
         <p:spPr>
           <a:xfrm>
             <a:off x="800100" y="4686300"/>
-            <a:ext cx="4095750" cy="1123950"/>
+            <a:ext cx="2819400" cy="1123950"/>
           </a:xfrm>
           <a:prstGeom prst="rect">
             <a:avLst/>
@@ -26693,9 +26580,8 @@
                 <a:ea typeface="Microsoft YaHei"/>
                 <a:cs typeface="Microsoft YaHei"/>
               </a:rPr>
-              <a:t>图片由服务端经已接入的模型通道转写成文本，返回公式的 LaTeX 源码与字符偏移位置，以及图像结构化描述；识别可能不准的片段会带低置信度标记。</a:t>
-            </a:r>
-            <a:endParaRPr/>
+              <a:t>上传一张图 → 服务端转成文本与 LaTeX，可就地纠错。实测：「抛物线 F(X)=X^2，P、Q 两点、过 P 的切线（红）与割线 PQ（绿）」</a:t>
+            </a:r>
           </a:p>
         </p:txBody>
       </p:sp>
@@ -26768,7 +26654,7 @@
         <p:spPr>
           <a:xfrm>
             <a:off x="800100" y="5943600"/>
-            <a:ext cx="2819400" cy="247650"/>
+            <a:ext cx="4089400" cy="247650"/>
           </a:xfrm>
           <a:prstGeom prst="rect">
             <a:avLst/>
@@ -26787,24 +26673,16 @@
               </a:lnSpc>
             </a:pPr>
             <a:r>
-              <a:rPr lang="zh-CN" sz="1200" b="0">
+              <a:rPr sz="1125" b="0">
                 <a:solidFill>
                   <a:srgbClr val="0F6E56"/>
                 </a:solidFill>
-                <a:latin typeface="Microsoft YaHei"/>
-                <a:ea typeface="Microsoft YaHei"/>
+                <a:latin typeface="Consolas"/>
+                <a:ea typeface="Consolas"/>
                 <a:cs typeface="Consolas"/>
               </a:rPr>
-              <a:t>实测识别结果（右图）：「抛物线 F(X)=X^2，标出 P、Q 两点，画出过 P 的切线（红）与割线 PQ（绿）；图例 SLOPE=2 / 3」；4 处公式转成 LaTeX，低置信度为空。</a:t>
-            </a:r>
-            <a:endParaRPr lang="zh-CN" sz="1200" b="0">
-              <a:solidFill>
-                <a:srgbClr val="0F6E56"/>
-              </a:solidFill>
-              <a:latin typeface="Microsoft YaHei"/>
-              <a:ea typeface="Microsoft YaHei"/>
-              <a:cs typeface="Consolas"/>
-            </a:endParaRPr>
+              <a:t>示例图 derivative.png　HTTP 200 / 3.81 s</a:t>
+            </a:r>
           </a:p>
         </p:txBody>
       </p:sp>
@@ -26871,24 +26749,17 @@
               </a:lnSpc>
             </a:pPr>
             <a:r>
-              <a:rPr lang="zh-CN" sz="1125" b="1">
+              <a:rPr sz="1425" b="1">
                 <a:solidFill>
                   <a:srgbClr val="1F1F1D"/>
                 </a:solidFill>
-                <a:latin typeface="Consolas"/>
-                <a:ea typeface="Consolas"/>
-                <a:cs typeface="Microsoft YaHei"/>
-              </a:rPr>
-              <a:t>示例图 derivative.png　HTTP 200 / 3.81 s　线上真实通道实测</a:t>
-            </a:r>
-            <a:endParaRPr lang="zh-CN" sz="1125" b="1">
-              <a:solidFill>
-                <a:srgbClr val="1F1F1D"/>
-              </a:solidFill>
-              <a:latin typeface="Consolas"/>
-              <a:ea typeface="Consolas"/>
-              <a:cs typeface="Microsoft YaHei"/>
-            </a:endParaRPr>
+                <a:latin typeface="Microsoft YaHei"/>
+                <a:ea typeface="Microsoft YaHei"/>
+                <a:cs typeface="Microsoft YaHei"/>
+              </a:rPr>
+              <a:t>文字 · 最基础入口</a:t>
+            </a:r>
+            <a:endParaRPr/>
           </a:p>
         </p:txBody>
       </p:sp>
